--- a/docs/presentasi/NewsTimes.pptx
+++ b/docs/presentasi/NewsTimes.pptx
@@ -4650,7 +4650,7 @@
               </a:defRPr>
             </a:pPr>
             <a:r>
-              <a:t>10 September 2026  ·  kondisi main di commit f979128</a:t>
+              <a:t>11 September 2026</a:t>
             </a:r>
           </a:p>
         </p:txBody>
@@ -7927,7 +7927,7 @@
               </a:defRPr>
             </a:pPr>
             <a:r>
-              <a:t>5 tabel, 4 kumpulan fungsi akses data, 151 pengecekan otomatis lulus</a:t>
+              <a:t>5 tabel, 4 kumpulan fungsi akses data, 163 pengecekan otomatis lulus</a:t>
             </a:r>
           </a:p>
         </p:txBody>
@@ -11305,7 +11305,7 @@
               </a:defRPr>
             </a:pPr>
             <a:r>
-              <a:t>151 pengecekan otomatis, semuanya lulus</a:t>
+              <a:t>163 pengecekan otomatis, semuanya lulus</a:t>
             </a:r>
           </a:p>
         </p:txBody>
@@ -11388,7 +11388,7 @@
               </a:defRPr>
             </a:pPr>
             <a:r>
-              <a:t>Dijalankan ulang 10 September 2026, bukan hasil lama</a:t>
+              <a:t>Dijalankan ulang 11 September 2026, bukan hasil lama</a:t>
             </a:r>
           </a:p>
         </p:txBody>
@@ -11704,7 +11704,7 @@
                         </a:defRPr>
                       </a:pPr>
                       <a:r>
-                        <a:t>PASS — 94 pengecekan</a:t>
+                        <a:t>PASS — 106 pengecekan</a:t>
                       </a:r>
                     </a:p>
                   </a:txBody>
